--- a/instructors/L4-carbon-awareness.pptx
+++ b/instructors/L4-carbon-awareness.pptx
@@ -137,186 +137,165 @@
 </p:presentation>
 </file>
 
-<file path=ppt/revisionInfo.xml><?xml version="1.0" encoding="utf-8"?>
-<p1510:revInfo xmlns:a="http://schemas.openxmlformats.org/drawingml/2006/main" xmlns:r="http://schemas.openxmlformats.org/officeDocument/2006/relationships" xmlns:p1510="http://schemas.microsoft.com/office/powerpoint/2015/10/main">
-  <p1510:revLst>
-    <p1510:client id="{00510263-4C69-0E46-B108-BF94E9A56584}" v="5" dt="2025-10-07T13:39:55.726"/>
-  </p1510:revLst>
-</p1510:revInfo>
-</file>
-
 <file path=ppt/changesInfos/changesInfo1.xml><?xml version="1.0" encoding="utf-8"?>
 <pc:chgInfo xmlns:a="http://schemas.openxmlformats.org/drawingml/2006/main" xmlns:r="http://schemas.openxmlformats.org/officeDocument/2006/relationships" xmlns:ac="http://schemas.microsoft.com/office/drawing/2013/main/command" xmlns:pc="http://schemas.microsoft.com/office/powerpoint/2013/main/command">
   <pc:docChgLst>
     <pc:chgData name="Andrew Turner" userId="9b60647a-c825-4266-aafa-670849c64782" providerId="ADAL" clId="{292526B5-234E-5EAA-AFB8-0412B8CA4453}"/>
     <pc:docChg chg="custSel addSld modSld modMainMaster">
-      <pc:chgData name="Andrew Turner" userId="9b60647a-c825-4266-aafa-670849c64782" providerId="ADAL" clId="{292526B5-234E-5EAA-AFB8-0412B8CA4453}" dt="2025-10-07T13:39:58.842" v="31" actId="20577"/>
+      <pc:chgData name="Andrew Turner" userId="9b60647a-c825-4266-aafa-670849c64782" providerId="ADAL" clId="{292526B5-234E-5EAA-AFB8-0412B8CA4453}" dt="2026-02-25T20:58:53.143" v="207" actId="20577"/>
       <pc:docMkLst>
         <pc:docMk/>
       </pc:docMkLst>
-      <pc:sldChg chg="setBg">
-        <pc:chgData name="Andrew Turner" userId="9b60647a-c825-4266-aafa-670849c64782" providerId="ADAL" clId="{292526B5-234E-5EAA-AFB8-0412B8CA4453}" dt="2025-10-07T13:29:39.200" v="1"/>
+      <pc:sldChg chg="modSp mod">
+        <pc:chgData name="Andrew Turner" userId="9b60647a-c825-4266-aafa-670849c64782" providerId="ADAL" clId="{292526B5-234E-5EAA-AFB8-0412B8CA4453}" dt="2026-02-25T20:38:56.309" v="38" actId="20577"/>
         <pc:sldMkLst>
           <pc:docMk/>
-          <pc:sldMk cId="2414141292" sldId="256"/>
-        </pc:sldMkLst>
-      </pc:sldChg>
-      <pc:sldChg chg="modSp mod">
-        <pc:chgData name="Andrew Turner" userId="9b60647a-c825-4266-aafa-670849c64782" providerId="ADAL" clId="{292526B5-234E-5EAA-AFB8-0412B8CA4453}" dt="2025-10-07T13:39:58.842" v="31" actId="20577"/>
-        <pc:sldMkLst>
-          <pc:docMk/>
-          <pc:sldMk cId="1181395689" sldId="258"/>
+          <pc:sldMk cId="662074219" sldId="259"/>
         </pc:sldMkLst>
         <pc:spChg chg="mod">
-          <ac:chgData name="Andrew Turner" userId="9b60647a-c825-4266-aafa-670849c64782" providerId="ADAL" clId="{292526B5-234E-5EAA-AFB8-0412B8CA4453}" dt="2025-10-07T13:39:58.842" v="31" actId="20577"/>
+          <ac:chgData name="Andrew Turner" userId="9b60647a-c825-4266-aafa-670849c64782" providerId="ADAL" clId="{292526B5-234E-5EAA-AFB8-0412B8CA4453}" dt="2026-02-25T20:38:56.309" v="38" actId="20577"/>
           <ac:spMkLst>
             <pc:docMk/>
-            <pc:sldMk cId="1181395689" sldId="258"/>
-            <ac:spMk id="3" creationId="{B8D7C110-210B-A5C7-C413-7B1DF9CBDC8F}"/>
+            <pc:sldMk cId="662074219" sldId="259"/>
+            <ac:spMk id="3" creationId="{6F4BF479-024E-FDBC-8CFB-0419CECE45B9}"/>
           </ac:spMkLst>
         </pc:spChg>
       </pc:sldChg>
-      <pc:sldChg chg="modSp new mod">
-        <pc:chgData name="Andrew Turner" userId="9b60647a-c825-4266-aafa-670849c64782" providerId="ADAL" clId="{292526B5-234E-5EAA-AFB8-0412B8CA4453}" dt="2025-10-07T13:30:55.560" v="13" actId="5793"/>
+      <pc:sldChg chg="modSp mod">
+        <pc:chgData name="Andrew Turner" userId="9b60647a-c825-4266-aafa-670849c64782" providerId="ADAL" clId="{292526B5-234E-5EAA-AFB8-0412B8CA4453}" dt="2026-02-25T20:39:28.364" v="39" actId="14100"/>
         <pc:sldMkLst>
           <pc:docMk/>
-          <pc:sldMk cId="365641914" sldId="277"/>
+          <pc:sldMk cId="2395960425" sldId="262"/>
         </pc:sldMkLst>
         <pc:spChg chg="mod">
-          <ac:chgData name="Andrew Turner" userId="9b60647a-c825-4266-aafa-670849c64782" providerId="ADAL" clId="{292526B5-234E-5EAA-AFB8-0412B8CA4453}" dt="2025-10-07T13:30:46.461" v="11" actId="20577"/>
+          <ac:chgData name="Andrew Turner" userId="9b60647a-c825-4266-aafa-670849c64782" providerId="ADAL" clId="{292526B5-234E-5EAA-AFB8-0412B8CA4453}" dt="2026-02-25T20:39:28.364" v="39" actId="14100"/>
           <ac:spMkLst>
             <pc:docMk/>
-            <pc:sldMk cId="365641914" sldId="277"/>
-            <ac:spMk id="2" creationId="{B1CB7E89-842F-A54A-963B-EC4202DE627D}"/>
-          </ac:spMkLst>
-        </pc:spChg>
-        <pc:spChg chg="mod">
-          <ac:chgData name="Andrew Turner" userId="9b60647a-c825-4266-aafa-670849c64782" providerId="ADAL" clId="{292526B5-234E-5EAA-AFB8-0412B8CA4453}" dt="2025-10-07T13:30:55.560" v="13" actId="5793"/>
-          <ac:spMkLst>
-            <pc:docMk/>
-            <pc:sldMk cId="365641914" sldId="277"/>
-            <ac:spMk id="3" creationId="{61158D2E-F2DD-4FEB-1772-E71323CC22EC}"/>
+            <pc:sldMk cId="2395960425" sldId="262"/>
+            <ac:spMk id="5" creationId="{14F031AE-5EA0-14C1-F2A9-26373DB8EF7F}"/>
           </ac:spMkLst>
         </pc:spChg>
       </pc:sldChg>
-      <pc:sldChg chg="modSp new mod">
-        <pc:chgData name="Andrew Turner" userId="9b60647a-c825-4266-aafa-670849c64782" providerId="ADAL" clId="{292526B5-234E-5EAA-AFB8-0412B8CA4453}" dt="2025-10-07T13:39:33.429" v="27" actId="20577"/>
+      <pc:sldChg chg="modSp mod">
+        <pc:chgData name="Andrew Turner" userId="9b60647a-c825-4266-aafa-670849c64782" providerId="ADAL" clId="{292526B5-234E-5EAA-AFB8-0412B8CA4453}" dt="2026-02-25T20:40:32.319" v="110" actId="20577"/>
         <pc:sldMkLst>
           <pc:docMk/>
-          <pc:sldMk cId="3480535562" sldId="278"/>
+          <pc:sldMk cId="1448763698" sldId="263"/>
         </pc:sldMkLst>
         <pc:spChg chg="mod">
-          <ac:chgData name="Andrew Turner" userId="9b60647a-c825-4266-aafa-670849c64782" providerId="ADAL" clId="{292526B5-234E-5EAA-AFB8-0412B8CA4453}" dt="2025-10-07T13:39:22.879" v="24" actId="20577"/>
+          <ac:chgData name="Andrew Turner" userId="9b60647a-c825-4266-aafa-670849c64782" providerId="ADAL" clId="{292526B5-234E-5EAA-AFB8-0412B8CA4453}" dt="2026-02-25T20:40:32.319" v="110" actId="20577"/>
           <ac:spMkLst>
             <pc:docMk/>
-            <pc:sldMk cId="3480535562" sldId="278"/>
-            <ac:spMk id="2" creationId="{C06E3AB7-BC03-2531-F63B-80A14B3B67BE}"/>
-          </ac:spMkLst>
-        </pc:spChg>
-        <pc:spChg chg="mod">
-          <ac:chgData name="Andrew Turner" userId="9b60647a-c825-4266-aafa-670849c64782" providerId="ADAL" clId="{292526B5-234E-5EAA-AFB8-0412B8CA4453}" dt="2025-10-07T13:39:33.429" v="27" actId="20577"/>
-          <ac:spMkLst>
-            <pc:docMk/>
-            <pc:sldMk cId="3480535562" sldId="278"/>
-            <ac:spMk id="3" creationId="{B8EF3A5A-7398-C020-161F-ECB9A34FAF49}"/>
+            <pc:sldMk cId="1448763698" sldId="263"/>
+            <ac:spMk id="13" creationId="{45BDD170-4FF5-86A6-87A4-926F0FC592C7}"/>
           </ac:spMkLst>
         </pc:spChg>
       </pc:sldChg>
-      <pc:sldMasterChg chg="setBg modSldLayout">
-        <pc:chgData name="Andrew Turner" userId="9b60647a-c825-4266-aafa-670849c64782" providerId="ADAL" clId="{292526B5-234E-5EAA-AFB8-0412B8CA4453}" dt="2025-10-07T13:29:39.200" v="1"/>
-        <pc:sldMasterMkLst>
+      <pc:sldChg chg="modSp mod">
+        <pc:chgData name="Andrew Turner" userId="9b60647a-c825-4266-aafa-670849c64782" providerId="ADAL" clId="{292526B5-234E-5EAA-AFB8-0412B8CA4453}" dt="2026-02-25T20:50:16.537" v="180" actId="20577"/>
+        <pc:sldMkLst>
           <pc:docMk/>
-          <pc:sldMasterMk cId="2084719545" sldId="2147483648"/>
-        </pc:sldMasterMkLst>
-        <pc:sldLayoutChg chg="setBg">
-          <pc:chgData name="Andrew Turner" userId="9b60647a-c825-4266-aafa-670849c64782" providerId="ADAL" clId="{292526B5-234E-5EAA-AFB8-0412B8CA4453}" dt="2025-10-07T13:29:39.200" v="1"/>
-          <pc:sldLayoutMkLst>
+          <pc:sldMk cId="2648578829" sldId="267"/>
+        </pc:sldMkLst>
+        <pc:spChg chg="mod">
+          <ac:chgData name="Andrew Turner" userId="9b60647a-c825-4266-aafa-670849c64782" providerId="ADAL" clId="{292526B5-234E-5EAA-AFB8-0412B8CA4453}" dt="2026-02-25T20:50:16.537" v="180" actId="20577"/>
+          <ac:spMkLst>
             <pc:docMk/>
-            <pc:sldMasterMk cId="2084719545" sldId="2147483648"/>
-            <pc:sldLayoutMk cId="785453709" sldId="2147483649"/>
-          </pc:sldLayoutMkLst>
-        </pc:sldLayoutChg>
-        <pc:sldLayoutChg chg="setBg">
-          <pc:chgData name="Andrew Turner" userId="9b60647a-c825-4266-aafa-670849c64782" providerId="ADAL" clId="{292526B5-234E-5EAA-AFB8-0412B8CA4453}" dt="2025-10-07T13:29:39.200" v="1"/>
-          <pc:sldLayoutMkLst>
+            <pc:sldMk cId="2648578829" sldId="267"/>
+            <ac:spMk id="3" creationId="{3D18D023-F320-3261-FE78-8F5251082B9C}"/>
+          </ac:spMkLst>
+        </pc:spChg>
+      </pc:sldChg>
+      <pc:sldChg chg="modSp mod">
+        <pc:chgData name="Andrew Turner" userId="9b60647a-c825-4266-aafa-670849c64782" providerId="ADAL" clId="{292526B5-234E-5EAA-AFB8-0412B8CA4453}" dt="2026-02-25T20:54:00.075" v="181" actId="1076"/>
+        <pc:sldMkLst>
+          <pc:docMk/>
+          <pc:sldMk cId="2947382115" sldId="268"/>
+        </pc:sldMkLst>
+        <pc:spChg chg="mod">
+          <ac:chgData name="Andrew Turner" userId="9b60647a-c825-4266-aafa-670849c64782" providerId="ADAL" clId="{292526B5-234E-5EAA-AFB8-0412B8CA4453}" dt="2026-02-25T20:54:00.075" v="181" actId="1076"/>
+          <ac:spMkLst>
             <pc:docMk/>
-            <pc:sldMasterMk cId="2084719545" sldId="2147483648"/>
-            <pc:sldLayoutMk cId="1212314499" sldId="2147483650"/>
-          </pc:sldLayoutMkLst>
-        </pc:sldLayoutChg>
-        <pc:sldLayoutChg chg="setBg">
-          <pc:chgData name="Andrew Turner" userId="9b60647a-c825-4266-aafa-670849c64782" providerId="ADAL" clId="{292526B5-234E-5EAA-AFB8-0412B8CA4453}" dt="2025-10-07T13:29:39.200" v="1"/>
-          <pc:sldLayoutMkLst>
+            <pc:sldMk cId="2947382115" sldId="268"/>
+            <ac:spMk id="3" creationId="{184BF083-39D2-7135-C5D3-F549AAD28B7E}"/>
+          </ac:spMkLst>
+        </pc:spChg>
+      </pc:sldChg>
+      <pc:sldChg chg="modSp mod">
+        <pc:chgData name="Andrew Turner" userId="9b60647a-c825-4266-aafa-670849c64782" providerId="ADAL" clId="{292526B5-234E-5EAA-AFB8-0412B8CA4453}" dt="2026-02-25T20:54:24.824" v="183" actId="12"/>
+        <pc:sldMkLst>
+          <pc:docMk/>
+          <pc:sldMk cId="1957150339" sldId="269"/>
+        </pc:sldMkLst>
+        <pc:spChg chg="mod">
+          <ac:chgData name="Andrew Turner" userId="9b60647a-c825-4266-aafa-670849c64782" providerId="ADAL" clId="{292526B5-234E-5EAA-AFB8-0412B8CA4453}" dt="2026-02-25T20:54:24.824" v="183" actId="12"/>
+          <ac:spMkLst>
             <pc:docMk/>
-            <pc:sldMasterMk cId="2084719545" sldId="2147483648"/>
-            <pc:sldLayoutMk cId="807772394" sldId="2147483651"/>
-          </pc:sldLayoutMkLst>
-        </pc:sldLayoutChg>
-        <pc:sldLayoutChg chg="setBg">
-          <pc:chgData name="Andrew Turner" userId="9b60647a-c825-4266-aafa-670849c64782" providerId="ADAL" clId="{292526B5-234E-5EAA-AFB8-0412B8CA4453}" dt="2025-10-07T13:29:39.200" v="1"/>
-          <pc:sldLayoutMkLst>
+            <pc:sldMk cId="1957150339" sldId="269"/>
+            <ac:spMk id="3" creationId="{9FAB3CC4-0A46-7360-DFE8-2335485631E3}"/>
+          </ac:spMkLst>
+        </pc:spChg>
+      </pc:sldChg>
+      <pc:sldChg chg="modSp mod">
+        <pc:chgData name="Andrew Turner" userId="9b60647a-c825-4266-aafa-670849c64782" providerId="ADAL" clId="{292526B5-234E-5EAA-AFB8-0412B8CA4453}" dt="2026-02-25T20:58:08.569" v="184" actId="20577"/>
+        <pc:sldMkLst>
+          <pc:docMk/>
+          <pc:sldMk cId="571887974" sldId="271"/>
+        </pc:sldMkLst>
+        <pc:spChg chg="mod">
+          <ac:chgData name="Andrew Turner" userId="9b60647a-c825-4266-aafa-670849c64782" providerId="ADAL" clId="{292526B5-234E-5EAA-AFB8-0412B8CA4453}" dt="2026-02-25T20:58:08.569" v="184" actId="20577"/>
+          <ac:spMkLst>
             <pc:docMk/>
-            <pc:sldMasterMk cId="2084719545" sldId="2147483648"/>
-            <pc:sldLayoutMk cId="1711621900" sldId="2147483652"/>
-          </pc:sldLayoutMkLst>
-        </pc:sldLayoutChg>
-        <pc:sldLayoutChg chg="setBg">
-          <pc:chgData name="Andrew Turner" userId="9b60647a-c825-4266-aafa-670849c64782" providerId="ADAL" clId="{292526B5-234E-5EAA-AFB8-0412B8CA4453}" dt="2025-10-07T13:29:39.200" v="1"/>
-          <pc:sldLayoutMkLst>
+            <pc:sldMk cId="571887974" sldId="271"/>
+            <ac:spMk id="3" creationId="{1E460C75-9842-1E6A-2CD4-15B58ECBFBD2}"/>
+          </ac:spMkLst>
+        </pc:spChg>
+      </pc:sldChg>
+      <pc:sldChg chg="modSp mod">
+        <pc:chgData name="Andrew Turner" userId="9b60647a-c825-4266-aafa-670849c64782" providerId="ADAL" clId="{292526B5-234E-5EAA-AFB8-0412B8CA4453}" dt="2026-02-25T20:58:21.677" v="186" actId="1076"/>
+        <pc:sldMkLst>
+          <pc:docMk/>
+          <pc:sldMk cId="3996305591" sldId="272"/>
+        </pc:sldMkLst>
+        <pc:spChg chg="mod">
+          <ac:chgData name="Andrew Turner" userId="9b60647a-c825-4266-aafa-670849c64782" providerId="ADAL" clId="{292526B5-234E-5EAA-AFB8-0412B8CA4453}" dt="2026-02-25T20:58:21.677" v="186" actId="1076"/>
+          <ac:spMkLst>
             <pc:docMk/>
-            <pc:sldMasterMk cId="2084719545" sldId="2147483648"/>
-            <pc:sldLayoutMk cId="171337435" sldId="2147483653"/>
-          </pc:sldLayoutMkLst>
-        </pc:sldLayoutChg>
-        <pc:sldLayoutChg chg="setBg">
-          <pc:chgData name="Andrew Turner" userId="9b60647a-c825-4266-aafa-670849c64782" providerId="ADAL" clId="{292526B5-234E-5EAA-AFB8-0412B8CA4453}" dt="2025-10-07T13:29:39.200" v="1"/>
-          <pc:sldLayoutMkLst>
+            <pc:sldMk cId="3996305591" sldId="272"/>
+            <ac:spMk id="6" creationId="{DD653AF5-A2F0-5B5F-54E1-6E095C4292BF}"/>
+          </ac:spMkLst>
+        </pc:spChg>
+      </pc:sldChg>
+      <pc:sldChg chg="modSp mod">
+        <pc:chgData name="Andrew Turner" userId="9b60647a-c825-4266-aafa-670849c64782" providerId="ADAL" clId="{292526B5-234E-5EAA-AFB8-0412B8CA4453}" dt="2026-02-25T20:58:39.698" v="206" actId="1036"/>
+        <pc:sldMkLst>
+          <pc:docMk/>
+          <pc:sldMk cId="397264304" sldId="274"/>
+        </pc:sldMkLst>
+        <pc:picChg chg="mod">
+          <ac:chgData name="Andrew Turner" userId="9b60647a-c825-4266-aafa-670849c64782" providerId="ADAL" clId="{292526B5-234E-5EAA-AFB8-0412B8CA4453}" dt="2026-02-25T20:58:39.698" v="206" actId="1036"/>
+          <ac:picMkLst>
             <pc:docMk/>
-            <pc:sldMasterMk cId="2084719545" sldId="2147483648"/>
-            <pc:sldLayoutMk cId="1996026068" sldId="2147483654"/>
-          </pc:sldLayoutMkLst>
-        </pc:sldLayoutChg>
-        <pc:sldLayoutChg chg="setBg">
-          <pc:chgData name="Andrew Turner" userId="9b60647a-c825-4266-aafa-670849c64782" providerId="ADAL" clId="{292526B5-234E-5EAA-AFB8-0412B8CA4453}" dt="2025-10-07T13:29:39.200" v="1"/>
-          <pc:sldLayoutMkLst>
+            <pc:sldMk cId="397264304" sldId="274"/>
+            <ac:picMk id="4" creationId="{498D5E7B-EFEB-C974-C6FD-E592E83A1AB4}"/>
+          </ac:picMkLst>
+        </pc:picChg>
+      </pc:sldChg>
+      <pc:sldChg chg="modSp mod">
+        <pc:chgData name="Andrew Turner" userId="9b60647a-c825-4266-aafa-670849c64782" providerId="ADAL" clId="{292526B5-234E-5EAA-AFB8-0412B8CA4453}" dt="2026-02-25T20:58:53.143" v="207" actId="20577"/>
+        <pc:sldMkLst>
+          <pc:docMk/>
+          <pc:sldMk cId="2836362304" sldId="276"/>
+        </pc:sldMkLst>
+        <pc:spChg chg="mod">
+          <ac:chgData name="Andrew Turner" userId="9b60647a-c825-4266-aafa-670849c64782" providerId="ADAL" clId="{292526B5-234E-5EAA-AFB8-0412B8CA4453}" dt="2026-02-25T20:58:53.143" v="207" actId="20577"/>
+          <ac:spMkLst>
             <pc:docMk/>
-            <pc:sldMasterMk cId="2084719545" sldId="2147483648"/>
-            <pc:sldLayoutMk cId="3964091850" sldId="2147483655"/>
-          </pc:sldLayoutMkLst>
-        </pc:sldLayoutChg>
-        <pc:sldLayoutChg chg="setBg">
-          <pc:chgData name="Andrew Turner" userId="9b60647a-c825-4266-aafa-670849c64782" providerId="ADAL" clId="{292526B5-234E-5EAA-AFB8-0412B8CA4453}" dt="2025-10-07T13:29:39.200" v="1"/>
-          <pc:sldLayoutMkLst>
-            <pc:docMk/>
-            <pc:sldMasterMk cId="2084719545" sldId="2147483648"/>
-            <pc:sldLayoutMk cId="2354250369" sldId="2147483656"/>
-          </pc:sldLayoutMkLst>
-        </pc:sldLayoutChg>
-        <pc:sldLayoutChg chg="setBg">
-          <pc:chgData name="Andrew Turner" userId="9b60647a-c825-4266-aafa-670849c64782" providerId="ADAL" clId="{292526B5-234E-5EAA-AFB8-0412B8CA4453}" dt="2025-10-07T13:29:39.200" v="1"/>
-          <pc:sldLayoutMkLst>
-            <pc:docMk/>
-            <pc:sldMasterMk cId="2084719545" sldId="2147483648"/>
-            <pc:sldLayoutMk cId="1651215456" sldId="2147483657"/>
-          </pc:sldLayoutMkLst>
-        </pc:sldLayoutChg>
-        <pc:sldLayoutChg chg="setBg">
-          <pc:chgData name="Andrew Turner" userId="9b60647a-c825-4266-aafa-670849c64782" providerId="ADAL" clId="{292526B5-234E-5EAA-AFB8-0412B8CA4453}" dt="2025-10-07T13:29:39.200" v="1"/>
-          <pc:sldLayoutMkLst>
-            <pc:docMk/>
-            <pc:sldMasterMk cId="2084719545" sldId="2147483648"/>
-            <pc:sldLayoutMk cId="1168730819" sldId="2147483658"/>
-          </pc:sldLayoutMkLst>
-        </pc:sldLayoutChg>
-        <pc:sldLayoutChg chg="setBg">
-          <pc:chgData name="Andrew Turner" userId="9b60647a-c825-4266-aafa-670849c64782" providerId="ADAL" clId="{292526B5-234E-5EAA-AFB8-0412B8CA4453}" dt="2025-10-07T13:29:39.200" v="1"/>
-          <pc:sldLayoutMkLst>
-            <pc:docMk/>
-            <pc:sldMasterMk cId="2084719545" sldId="2147483648"/>
-            <pc:sldLayoutMk cId="1304486253" sldId="2147483659"/>
-          </pc:sldLayoutMkLst>
-        </pc:sldLayoutChg>
-      </pc:sldMasterChg>
+            <pc:sldMk cId="2836362304" sldId="276"/>
+            <ac:spMk id="3" creationId="{C9DF8901-12C5-193E-6916-8D87BA0F6D81}"/>
+          </ac:spMkLst>
+        </pc:spChg>
+      </pc:sldChg>
     </pc:docChg>
   </pc:docChgLst>
 </pc:chgInfo>
@@ -404,7 +383,7 @@
           <a:p>
             <a:fld id="{17F04524-679D-D640-953F-C37E643109F2}" type="datetimeFigureOut">
               <a:rPr lang="en-GB" smtClean="0"/>
-              <a:t>07/10/2025</a:t>
+              <a:t>25/02/2026</a:t>
             </a:fld>
             <a:endParaRPr lang="en-GB"/>
           </a:p>
@@ -1007,7 +986,7 @@
           <a:p>
             <a:fld id="{672813EE-9A87-8947-B3D8-63B457B8D0DE}" type="datetimeFigureOut">
               <a:rPr lang="en-GB" smtClean="0"/>
-              <a:t>07/10/2025</a:t>
+              <a:t>25/02/2026</a:t>
             </a:fld>
             <a:endParaRPr lang="en-GB"/>
           </a:p>
@@ -1205,7 +1184,7 @@
           <a:p>
             <a:fld id="{672813EE-9A87-8947-B3D8-63B457B8D0DE}" type="datetimeFigureOut">
               <a:rPr lang="en-GB" smtClean="0"/>
-              <a:t>07/10/2025</a:t>
+              <a:t>25/02/2026</a:t>
             </a:fld>
             <a:endParaRPr lang="en-GB"/>
           </a:p>
@@ -1413,7 +1392,7 @@
           <a:p>
             <a:fld id="{672813EE-9A87-8947-B3D8-63B457B8D0DE}" type="datetimeFigureOut">
               <a:rPr lang="en-GB" smtClean="0"/>
-              <a:t>07/10/2025</a:t>
+              <a:t>25/02/2026</a:t>
             </a:fld>
             <a:endParaRPr lang="en-GB"/>
           </a:p>
@@ -1611,7 +1590,7 @@
           <a:p>
             <a:fld id="{672813EE-9A87-8947-B3D8-63B457B8D0DE}" type="datetimeFigureOut">
               <a:rPr lang="en-GB" smtClean="0"/>
-              <a:t>07/10/2025</a:t>
+              <a:t>25/02/2026</a:t>
             </a:fld>
             <a:endParaRPr lang="en-GB"/>
           </a:p>
@@ -1886,7 +1865,7 @@
           <a:p>
             <a:fld id="{672813EE-9A87-8947-B3D8-63B457B8D0DE}" type="datetimeFigureOut">
               <a:rPr lang="en-GB" smtClean="0"/>
-              <a:t>07/10/2025</a:t>
+              <a:t>25/02/2026</a:t>
             </a:fld>
             <a:endParaRPr lang="en-GB"/>
           </a:p>
@@ -2151,7 +2130,7 @@
           <a:p>
             <a:fld id="{672813EE-9A87-8947-B3D8-63B457B8D0DE}" type="datetimeFigureOut">
               <a:rPr lang="en-GB" smtClean="0"/>
-              <a:t>07/10/2025</a:t>
+              <a:t>25/02/2026</a:t>
             </a:fld>
             <a:endParaRPr lang="en-GB"/>
           </a:p>
@@ -2563,7 +2542,7 @@
           <a:p>
             <a:fld id="{672813EE-9A87-8947-B3D8-63B457B8D0DE}" type="datetimeFigureOut">
               <a:rPr lang="en-GB" smtClean="0"/>
-              <a:t>07/10/2025</a:t>
+              <a:t>25/02/2026</a:t>
             </a:fld>
             <a:endParaRPr lang="en-GB"/>
           </a:p>
@@ -2704,7 +2683,7 @@
           <a:p>
             <a:fld id="{672813EE-9A87-8947-B3D8-63B457B8D0DE}" type="datetimeFigureOut">
               <a:rPr lang="en-GB" smtClean="0"/>
-              <a:t>07/10/2025</a:t>
+              <a:t>25/02/2026</a:t>
             </a:fld>
             <a:endParaRPr lang="en-GB"/>
           </a:p>
@@ -2817,7 +2796,7 @@
           <a:p>
             <a:fld id="{672813EE-9A87-8947-B3D8-63B457B8D0DE}" type="datetimeFigureOut">
               <a:rPr lang="en-GB" smtClean="0"/>
-              <a:t>07/10/2025</a:t>
+              <a:t>25/02/2026</a:t>
             </a:fld>
             <a:endParaRPr lang="en-GB"/>
           </a:p>
@@ -3128,7 +3107,7 @@
           <a:p>
             <a:fld id="{672813EE-9A87-8947-B3D8-63B457B8D0DE}" type="datetimeFigureOut">
               <a:rPr lang="en-GB" smtClean="0"/>
-              <a:t>07/10/2025</a:t>
+              <a:t>25/02/2026</a:t>
             </a:fld>
             <a:endParaRPr lang="en-GB"/>
           </a:p>
@@ -3416,7 +3395,7 @@
           <a:p>
             <a:fld id="{672813EE-9A87-8947-B3D8-63B457B8D0DE}" type="datetimeFigureOut">
               <a:rPr lang="en-GB" smtClean="0"/>
-              <a:t>07/10/2025</a:t>
+              <a:t>25/02/2026</a:t>
             </a:fld>
             <a:endParaRPr lang="en-GB"/>
           </a:p>
@@ -3660,7 +3639,7 @@
           <a:p>
             <a:fld id="{672813EE-9A87-8947-B3D8-63B457B8D0DE}" type="datetimeFigureOut">
               <a:rPr lang="en-GB" smtClean="0"/>
-              <a:t>07/10/2025</a:t>
+              <a:t>25/02/2026</a:t>
             </a:fld>
             <a:endParaRPr lang="en-GB"/>
           </a:p>
@@ -4622,7 +4601,7 @@
         <p:spPr>
           <a:xfrm>
             <a:off x="838199" y="5291325"/>
-            <a:ext cx="10070335" cy="646331"/>
+            <a:ext cx="10070335" cy="1200329"/>
           </a:xfrm>
           <a:prstGeom prst="rect">
             <a:avLst/>
@@ -4634,6 +4613,46 @@
             <a:spAutoFit/>
           </a:bodyPr>
           <a:lstStyle/>
+          <a:p>
+            <a:r>
+              <a:rPr lang="en-GB" b="0" i="0" dirty="0">
+                <a:solidFill>
+                  <a:srgbClr val="000000"/>
+                </a:solidFill>
+                <a:effectLst/>
+                <a:latin typeface="Gilroy-Regular"/>
+              </a:rPr>
+              <a:t>What is the estimated </a:t>
+            </a:r>
+            <a:r>
+              <a:rPr lang="en-GB" b="0" i="0" dirty="0" err="1">
+                <a:solidFill>
+                  <a:srgbClr val="000000"/>
+                </a:solidFill>
+                <a:effectLst/>
+                <a:latin typeface="Gilroy-Regular"/>
+              </a:rPr>
+              <a:t>senergy</a:t>
+            </a:r>
+            <a:r>
+              <a:rPr lang="en-GB" b="0" i="0" dirty="0">
+                <a:solidFill>
+                  <a:srgbClr val="000000"/>
+                </a:solidFill>
+                <a:effectLst/>
+                <a:latin typeface="Gilroy-Regular"/>
+              </a:rPr>
+              <a:t> consumption of ARCHER2 per year in kWh?</a:t>
+            </a:r>
+          </a:p>
+          <a:p>
+            <a:endParaRPr lang="en-GB" dirty="0">
+              <a:solidFill>
+                <a:srgbClr val="000000"/>
+              </a:solidFill>
+              <a:latin typeface="Gilroy-Regular"/>
+            </a:endParaRPr>
+          </a:p>
           <a:p>
             <a:r>
               <a:rPr lang="en-GB" b="0" i="0" dirty="0">
@@ -5275,7 +5294,7 @@
           <a:p>
             <a:r>
               <a:rPr lang="en-GB" dirty="0"/>
-              <a:t>Demand </a:t>
+              <a:t>Demand varies throughout a day, and supply must match that demand</a:t>
             </a:r>
           </a:p>
           <a:p>
@@ -5423,7 +5442,7 @@
         </p:nvSpPr>
         <p:spPr>
           <a:xfrm>
-            <a:off x="838200" y="1825625"/>
+            <a:off x="300990" y="1825625"/>
             <a:ext cx="4097357" cy="4351338"/>
           </a:xfrm>
         </p:spPr>
@@ -5567,14 +5586,20 @@
             </a:r>
           </a:p>
           <a:p>
-            <a:pPr lvl="1"/>
+            <a:pPr marL="914400" lvl="1" indent="-457200">
+              <a:buFont typeface="+mj-lt"/>
+              <a:buAutoNum type="arabicPeriod"/>
+            </a:pPr>
             <a:r>
               <a:rPr lang="en-GB" dirty="0"/>
               <a:t>fossil fuel plants – preferred as these are more expensive</a:t>
             </a:r>
           </a:p>
           <a:p>
-            <a:pPr lvl="1"/>
+            <a:pPr marL="914400" lvl="1" indent="-457200">
+              <a:buFont typeface="+mj-lt"/>
+              <a:buAutoNum type="arabicPeriod"/>
+            </a:pPr>
             <a:r>
               <a:rPr lang="en-GB" dirty="0"/>
               <a:t>renewable sources – last resort, leads to curtailment </a:t>
@@ -5595,14 +5620,20 @@
             </a:r>
           </a:p>
           <a:p>
-            <a:pPr lvl="1"/>
+            <a:pPr marL="914400" lvl="1" indent="-457200">
+              <a:buFont typeface="+mj-lt"/>
+              <a:buAutoNum type="arabicPeriod"/>
+            </a:pPr>
             <a:r>
               <a:rPr lang="en-GB" dirty="0"/>
               <a:t>renewable sources that are currently being curtailed – preferred as cheapest</a:t>
             </a:r>
           </a:p>
           <a:p>
-            <a:pPr lvl="1"/>
+            <a:pPr marL="914400" lvl="1" indent="-457200">
+              <a:buFont typeface="+mj-lt"/>
+              <a:buAutoNum type="arabicPeriod"/>
+            </a:pPr>
             <a:r>
               <a:rPr lang="en-GB" dirty="0"/>
               <a:t>fossil fuel plants – utilise inherent dispatchability, but expensive</a:t>
@@ -5808,7 +5839,7 @@
           <a:p>
             <a:r>
               <a:rPr lang="en-GB" dirty="0"/>
-              <a:t>To accelerate this transition we should aim to use more electricity when renewables are supplying and use less when it is supplied by fossil fuels</a:t>
+              <a:t>To accelerate this transition, we should aim to use more electricity when renewables are supplying and use less when it is supplied by fossil fuels</a:t>
             </a:r>
           </a:p>
           <a:p>
@@ -5959,8 +5990,8 @@
         </p:nvSpPr>
         <p:spPr>
           <a:xfrm>
-            <a:off x="838200" y="2494442"/>
-            <a:ext cx="2852451" cy="2308324"/>
+            <a:off x="838200" y="2353207"/>
+            <a:ext cx="2852451" cy="2862322"/>
           </a:xfrm>
           <a:prstGeom prst="rect">
             <a:avLst/>
@@ -5974,7 +6005,7 @@
           <a:lstStyle/>
           <a:p>
             <a:r>
-              <a:rPr lang="en-GB" b="0" i="0" dirty="0">
+              <a:rPr lang="en-GB" sz="2000" b="0" i="0" dirty="0">
                 <a:solidFill>
                   <a:srgbClr val="000000"/>
                 </a:solidFill>
@@ -5985,7 +6016,7 @@
             </a:r>
           </a:p>
           <a:p>
-            <a:endParaRPr lang="en-GB" dirty="0">
+            <a:endParaRPr lang="en-GB" sz="2000" dirty="0">
               <a:solidFill>
                 <a:srgbClr val="000000"/>
               </a:solidFill>
@@ -5994,7 +6025,7 @@
           </a:p>
           <a:p>
             <a:r>
-              <a:rPr lang="en-GB" dirty="0">
+              <a:rPr lang="en-GB" sz="2000" dirty="0">
                 <a:solidFill>
                   <a:srgbClr val="000000"/>
                 </a:solidFill>
@@ -6002,7 +6033,7 @@
               </a:rPr>
               <a:t>This requires the ability to easily run at different locations</a:t>
             </a:r>
-            <a:endParaRPr lang="en-GB" dirty="0"/>
+            <a:endParaRPr lang="en-GB" sz="2000" dirty="0"/>
           </a:p>
         </p:txBody>
       </p:sp>
@@ -6382,7 +6413,7 @@
         </p:blipFill>
         <p:spPr>
           <a:xfrm>
-            <a:off x="4346112" y="1806766"/>
+            <a:off x="4346112" y="1646746"/>
             <a:ext cx="7772400" cy="4376022"/>
           </a:xfrm>
           <a:prstGeom prst="rect">
@@ -6771,8 +6802,8 @@
           <a:p>
             <a:pPr lvl="1"/>
             <a:r>
-              <a:rPr lang="en-GB" dirty="0"/>
-              <a:t>For example </a:t>
+              <a:rPr lang="en-GB"/>
+              <a:t>For example: </a:t>
             </a:r>
             <a:r>
               <a:rPr lang="en-GB" dirty="0">
@@ -7267,7 +7298,7 @@
           <a:p>
             <a:r>
               <a:rPr lang="en-GB" dirty="0"/>
-              <a:t>In actual fact, an HPC system is plugged into a national grid that is supplied with electricity from various sources.</a:t>
+              <a:t>In reality, an HPC system is plugged into a national grid that is supplied with electricity from various sources.</a:t>
             </a:r>
           </a:p>
           <a:p>
@@ -8870,7 +8901,7 @@
         <p:spPr>
           <a:xfrm>
             <a:off x="799510" y="2456063"/>
-            <a:ext cx="3512458" cy="2246769"/>
+            <a:ext cx="2595200" cy="3170099"/>
           </a:xfrm>
           <a:prstGeom prst="rect">
             <a:avLst/>
